--- a/report/Vehicle_Selector_Pro_Pitch_Deck.pptx
+++ b/report/Vehicle_Selector_Pro_Pitch_Deck.pptx
@@ -19,6 +19,7 @@
     <p:sldId id="267" r:id="rId18"/>
     <p:sldId id="268" r:id="rId19"/>
     <p:sldId id="269" r:id="rId20"/>
+    <p:sldId id="270" r:id="rId21"/>
   </p:sldIdLst>
   <p:sldSz cx="12191695" cy="6858000" type="screen4x3"/>
   <p:notesSz cx="6858000" cy="9144000"/>
@@ -4715,7 +4716,7 @@
                 </a:solidFill>
                 <a:latin typeface="Calibri"/>
               </a:rPr>
-              <a:t>ROADMAP</a:t>
+              <a:t>GET STARTED</a:t>
             </a:r>
           </a:p>
         </p:txBody>
@@ -4766,7 +4767,7 @@
                 </a:solidFill>
                 <a:latin typeface="Calibri"/>
               </a:rPr>
-              <a:t>A foundation built to grow</a:t>
+              <a:t>Deploy &amp; install on your own store</a:t>
             </a:r>
           </a:p>
         </p:txBody>
@@ -4871,7 +4872,7 @@
                 </a:solidFill>
                 <a:latin typeface="Calibri"/>
               </a:rPr>
-              <a:t>Shopify Billing API for recurring and one-time plans.</a:t>
+              <a:t>Create the app in Shopify Partners — copy the API key &amp; secret, set the app and redirect URLs.</a:t>
             </a:r>
           </a:p>
           <a:p>
@@ -4898,7 +4899,7 @@
                 </a:solidFill>
                 <a:latin typeface="Calibri"/>
               </a:rPr>
-              <a:t>Supersession &amp; OE-number matching for a richer part engine.</a:t>
+              <a:t>Deploy the Rails app to Fly.io / Render with PostgreSQL, Redis and Sidekiq; boot with rails db:prepare.</a:t>
             </a:r>
           </a:p>
           <a:p>
@@ -4925,7 +4926,7 @@
                 </a:solidFill>
                 <a:latin typeface="Calibri"/>
               </a:rPr>
-              <a:t>Fitment confidence scoring and smarter universal/exact priority.</a:t>
+              <a:t>Register the App Proxy subpath /apps/vehicle-selector, then install on the store via OAuth (webhooks auto-register).</a:t>
             </a:r>
           </a:p>
           <a:p>
@@ -4952,7 +4953,61 @@
                 </a:solidFill>
                 <a:latin typeface="Calibri"/>
               </a:rPr>
-              <a:t>White-label theming, translations, and merchant analytics.</a:t>
+              <a:t>Create the one-time custom.vehicle_fitment metafield definition in Admin (Product, JSON, Public read).</a:t>
+            </a:r>
+          </a:p>
+          <a:p>
+            <a:pPr>
+              <a:lnSpc>
+                <a:spcPct val="190000"/>
+              </a:lnSpc>
+              <a:spcAft>
+                <a:spcPts val="760"/>
+              </a:spcAft>
+            </a:pPr>
+            <a:r>
+              <a:rPr sz="1500" b="1">
+                <a:solidFill>
+                  <a:srgbClr val="E04B33"/>
+                </a:solidFill>
+              </a:rPr>
+              <a:t>▪  </a:t>
+            </a:r>
+            <a:r>
+              <a:rPr sz="1500">
+                <a:solidFill>
+                  <a:srgbClr val="282A2E"/>
+                </a:solidFill>
+                <a:latin typeface="Calibri"/>
+              </a:rPr>
+              <a:t>Drop in the Theme App Extension blocks (vehicle selector + fitment badge) and publish the theme.</a:t>
+            </a:r>
+          </a:p>
+          <a:p>
+            <a:pPr>
+              <a:lnSpc>
+                <a:spcPct val="190000"/>
+              </a:lnSpc>
+              <a:spcAft>
+                <a:spcPts val="760"/>
+              </a:spcAft>
+            </a:pPr>
+            <a:r>
+              <a:rPr sz="1500" b="1">
+                <a:solidFill>
+                  <a:srgbClr val="E04B33"/>
+                </a:solidFill>
+              </a:rPr>
+              <a:t>▪  </a:t>
+            </a:r>
+            <a:r>
+              <a:rPr sz="1500">
+                <a:solidFill>
+                  <a:srgbClr val="282A2E"/>
+                </a:solidFill>
+                <a:latin typeface="Calibri"/>
+              </a:rPr>
+              <a:t>Bulk-import fitments, run the sync, verify PDP badges &amp; filters, and go live.</a:t>
             </a:r>
           </a:p>
         </p:txBody>
@@ -5076,7 +5131,7 @@
                 </a:solidFill>
                 <a:latin typeface="Calibri"/>
               </a:rPr>
-              <a:t>BUILD · PROVENANCE</a:t>
+              <a:t>ROADMAP</a:t>
             </a:r>
           </a:p>
         </p:txBody>
@@ -5127,7 +5182,7 @@
                 </a:solidFill>
                 <a:latin typeface="Calibri"/>
               </a:rPr>
-              <a:t>Built entirely with free AI tools</a:t>
+              <a:t>A foundation built to grow</a:t>
             </a:r>
           </a:p>
         </p:txBody>
@@ -5189,6 +5244,367 @@
       </p:sp>
       <p:sp>
         <p:nvSpPr>
+          <p:cNvPr id="6" name="TextBox 5"/>
+          <p:cNvSpPr txBox="1"/>
+          <p:nvPr/>
+        </p:nvSpPr>
+        <p:spPr>
+          <a:xfrm>
+            <a:off x="914400" y="2103120"/>
+            <a:ext cx="10241280" cy="4023360"/>
+          </a:xfrm>
+          <a:prstGeom prst="rect">
+            <a:avLst/>
+          </a:prstGeom>
+          <a:noFill/>
+        </p:spPr>
+        <p:txBody>
+          <a:bodyPr wrap="square">
+            <a:spAutoFit/>
+          </a:bodyPr>
+          <a:lstStyle/>
+          <a:p>
+            <a:pPr>
+              <a:lnSpc>
+                <a:spcPct val="190000"/>
+              </a:lnSpc>
+              <a:spcAft>
+                <a:spcPts val="760"/>
+              </a:spcAft>
+            </a:pPr>
+            <a:r>
+              <a:rPr sz="1500" b="1">
+                <a:solidFill>
+                  <a:srgbClr val="E04B33"/>
+                </a:solidFill>
+              </a:rPr>
+              <a:t>▪  </a:t>
+            </a:r>
+            <a:r>
+              <a:rPr sz="1500">
+                <a:solidFill>
+                  <a:srgbClr val="282A2E"/>
+                </a:solidFill>
+                <a:latin typeface="Calibri"/>
+              </a:rPr>
+              <a:t>Shopify Billing API for recurring and one-time plans.</a:t>
+            </a:r>
+          </a:p>
+          <a:p>
+            <a:pPr>
+              <a:lnSpc>
+                <a:spcPct val="190000"/>
+              </a:lnSpc>
+              <a:spcAft>
+                <a:spcPts val="760"/>
+              </a:spcAft>
+            </a:pPr>
+            <a:r>
+              <a:rPr sz="1500" b="1">
+                <a:solidFill>
+                  <a:srgbClr val="E04B33"/>
+                </a:solidFill>
+              </a:rPr>
+              <a:t>▪  </a:t>
+            </a:r>
+            <a:r>
+              <a:rPr sz="1500">
+                <a:solidFill>
+                  <a:srgbClr val="282A2E"/>
+                </a:solidFill>
+                <a:latin typeface="Calibri"/>
+              </a:rPr>
+              <a:t>Supersession &amp; OE-number matching for a richer part engine.</a:t>
+            </a:r>
+          </a:p>
+          <a:p>
+            <a:pPr>
+              <a:lnSpc>
+                <a:spcPct val="190000"/>
+              </a:lnSpc>
+              <a:spcAft>
+                <a:spcPts val="760"/>
+              </a:spcAft>
+            </a:pPr>
+            <a:r>
+              <a:rPr sz="1500" b="1">
+                <a:solidFill>
+                  <a:srgbClr val="E04B33"/>
+                </a:solidFill>
+              </a:rPr>
+              <a:t>▪  </a:t>
+            </a:r>
+            <a:r>
+              <a:rPr sz="1500">
+                <a:solidFill>
+                  <a:srgbClr val="282A2E"/>
+                </a:solidFill>
+                <a:latin typeface="Calibri"/>
+              </a:rPr>
+              <a:t>Fitment confidence scoring and smarter universal/exact priority.</a:t>
+            </a:r>
+          </a:p>
+          <a:p>
+            <a:pPr>
+              <a:lnSpc>
+                <a:spcPct val="190000"/>
+              </a:lnSpc>
+              <a:spcAft>
+                <a:spcPts val="760"/>
+              </a:spcAft>
+            </a:pPr>
+            <a:r>
+              <a:rPr sz="1500" b="1">
+                <a:solidFill>
+                  <a:srgbClr val="E04B33"/>
+                </a:solidFill>
+              </a:rPr>
+              <a:t>▪  </a:t>
+            </a:r>
+            <a:r>
+              <a:rPr sz="1500">
+                <a:solidFill>
+                  <a:srgbClr val="282A2E"/>
+                </a:solidFill>
+                <a:latin typeface="Calibri"/>
+              </a:rPr>
+              <a:t>White-label theming, translations, and merchant analytics.</a:t>
+            </a:r>
+          </a:p>
+        </p:txBody>
+      </p:sp>
+    </p:spTree>
+  </p:cSld>
+  <p:clrMapOvr>
+    <a:masterClrMapping/>
+  </p:clrMapOvr>
+</p:sld>
+</file>
+
+<file path=ppt/slides/slide14.xml><?xml version="1.0" encoding="utf-8"?>
+<p:sld xmlns:a="http://schemas.openxmlformats.org/drawingml/2006/main" xmlns:p="http://schemas.openxmlformats.org/presentationml/2006/main" xmlns:r="http://schemas.openxmlformats.org/officeDocument/2006/relationships">
+  <p:cSld>
+    <p:spTree>
+      <p:nvGrpSpPr>
+        <p:cNvPr id="1" name=""/>
+        <p:cNvGrpSpPr/>
+        <p:nvPr/>
+      </p:nvGrpSpPr>
+      <p:grpSpPr/>
+      <p:sp>
+        <p:nvSpPr>
+          <p:cNvPr id="2" name="Rectangle 1"/>
+          <p:cNvSpPr/>
+          <p:nvPr/>
+        </p:nvSpPr>
+        <p:spPr>
+          <a:xfrm>
+            <a:off x="0" y="0"/>
+            <a:ext cx="12191695" cy="128016"/>
+          </a:xfrm>
+          <a:prstGeom prst="rect">
+            <a:avLst/>
+          </a:prstGeom>
+          <a:solidFill>
+            <a:srgbClr val="E04B33"/>
+          </a:solidFill>
+          <a:ln>
+            <a:solidFill>
+              <a:srgbClr val="E04B33"/>
+            </a:solidFill>
+          </a:ln>
+          <a:effectLst/>
+        </p:spPr>
+        <p:style>
+          <a:lnRef idx="1">
+            <a:schemeClr val="accent1"/>
+          </a:lnRef>
+          <a:fillRef idx="3">
+            <a:schemeClr val="accent1"/>
+          </a:fillRef>
+          <a:effectRef idx="2">
+            <a:schemeClr val="accent1"/>
+          </a:effectRef>
+          <a:fontRef idx="minor">
+            <a:schemeClr val="lt1"/>
+          </a:fontRef>
+        </p:style>
+        <p:txBody>
+          <a:bodyPr rtlCol="0" anchor="t" wrap="square"/>
+          <a:lstStyle/>
+          <a:p>
+            <a:pPr algn="l"/>
+            <a:r>
+              <a:rPr sz="1400" b="0">
+                <a:solidFill>
+                  <a:srgbClr val="282A2E"/>
+                </a:solidFill>
+                <a:latin typeface="Calibri"/>
+              </a:rPr>
+              <a:t/>
+            </a:r>
+          </a:p>
+        </p:txBody>
+      </p:sp>
+      <p:sp>
+        <p:nvSpPr>
+          <p:cNvPr id="3" name="Rectangle 2"/>
+          <p:cNvSpPr/>
+          <p:nvPr/>
+        </p:nvSpPr>
+        <p:spPr>
+          <a:xfrm>
+            <a:off x="822960" y="548640"/>
+            <a:ext cx="5486400" cy="365760"/>
+          </a:xfrm>
+          <a:prstGeom prst="rect">
+            <a:avLst/>
+          </a:prstGeom>
+          <a:noFill/>
+          <a:ln>
+            <a:noFill/>
+          </a:ln>
+          <a:effectLst/>
+        </p:spPr>
+        <p:style>
+          <a:lnRef idx="1">
+            <a:schemeClr val="accent1"/>
+          </a:lnRef>
+          <a:fillRef idx="3">
+            <a:schemeClr val="accent1"/>
+          </a:fillRef>
+          <a:effectRef idx="2">
+            <a:schemeClr val="accent1"/>
+          </a:effectRef>
+          <a:fontRef idx="minor">
+            <a:schemeClr val="lt1"/>
+          </a:fontRef>
+        </p:style>
+        <p:txBody>
+          <a:bodyPr rtlCol="0" anchor="t" wrap="square"/>
+          <a:lstStyle/>
+          <a:p>
+            <a:pPr algn="l"/>
+            <a:r>
+              <a:rPr sz="1200" b="1">
+                <a:solidFill>
+                  <a:srgbClr val="E04B33"/>
+                </a:solidFill>
+                <a:latin typeface="Calibri"/>
+              </a:rPr>
+              <a:t>BUILD · PROVENANCE</a:t>
+            </a:r>
+          </a:p>
+        </p:txBody>
+      </p:sp>
+      <p:sp>
+        <p:nvSpPr>
+          <p:cNvPr id="4" name="Rectangle 3"/>
+          <p:cNvSpPr/>
+          <p:nvPr/>
+        </p:nvSpPr>
+        <p:spPr>
+          <a:xfrm>
+            <a:off x="822960" y="914400"/>
+            <a:ext cx="10515600" cy="914400"/>
+          </a:xfrm>
+          <a:prstGeom prst="rect">
+            <a:avLst/>
+          </a:prstGeom>
+          <a:noFill/>
+          <a:ln>
+            <a:noFill/>
+          </a:ln>
+          <a:effectLst/>
+        </p:spPr>
+        <p:style>
+          <a:lnRef idx="1">
+            <a:schemeClr val="accent1"/>
+          </a:lnRef>
+          <a:fillRef idx="3">
+            <a:schemeClr val="accent1"/>
+          </a:fillRef>
+          <a:effectRef idx="2">
+            <a:schemeClr val="accent1"/>
+          </a:effectRef>
+          <a:fontRef idx="minor">
+            <a:schemeClr val="lt1"/>
+          </a:fontRef>
+        </p:style>
+        <p:txBody>
+          <a:bodyPr rtlCol="0" anchor="t" wrap="square"/>
+          <a:lstStyle/>
+          <a:p>
+            <a:pPr algn="l"/>
+            <a:r>
+              <a:rPr sz="2800" b="1">
+                <a:solidFill>
+                  <a:srgbClr val="282A2E"/>
+                </a:solidFill>
+                <a:latin typeface="Calibri"/>
+              </a:rPr>
+              <a:t>Built entirely with free AI tools</a:t>
+            </a:r>
+          </a:p>
+        </p:txBody>
+      </p:sp>
+      <p:sp>
+        <p:nvSpPr>
+          <p:cNvPr id="5" name="Rectangle 4"/>
+          <p:cNvSpPr/>
+          <p:nvPr/>
+        </p:nvSpPr>
+        <p:spPr>
+          <a:xfrm>
+            <a:off x="822960" y="1828800"/>
+            <a:ext cx="10515600" cy="27432"/>
+          </a:xfrm>
+          <a:prstGeom prst="rect">
+            <a:avLst/>
+          </a:prstGeom>
+          <a:solidFill>
+            <a:srgbClr val="E04B33"/>
+          </a:solidFill>
+          <a:ln>
+            <a:solidFill>
+              <a:srgbClr val="E04B33"/>
+            </a:solidFill>
+          </a:ln>
+          <a:effectLst/>
+        </p:spPr>
+        <p:style>
+          <a:lnRef idx="1">
+            <a:schemeClr val="accent1"/>
+          </a:lnRef>
+          <a:fillRef idx="3">
+            <a:schemeClr val="accent1"/>
+          </a:fillRef>
+          <a:effectRef idx="2">
+            <a:schemeClr val="accent1"/>
+          </a:effectRef>
+          <a:fontRef idx="minor">
+            <a:schemeClr val="lt1"/>
+          </a:fontRef>
+        </p:style>
+        <p:txBody>
+          <a:bodyPr rtlCol="0" anchor="t" wrap="square"/>
+          <a:lstStyle/>
+          <a:p>
+            <a:pPr algn="l"/>
+            <a:r>
+              <a:rPr sz="1400" b="0">
+                <a:solidFill>
+                  <a:srgbClr val="282A2E"/>
+                </a:solidFill>
+                <a:latin typeface="Calibri"/>
+              </a:rPr>
+              <a:t/>
+            </a:r>
+          </a:p>
+        </p:txBody>
+      </p:sp>
+      <p:sp>
+        <p:nvSpPr>
           <p:cNvPr id="6" name="Rectangle 5"/>
           <p:cNvSpPr/>
           <p:nvPr/>
@@ -5250,7 +5666,7 @@
 </p:sld>
 </file>
 
-<file path=ppt/slides/slide14.xml><?xml version="1.0" encoding="utf-8"?>
+<file path=ppt/slides/slide15.xml><?xml version="1.0" encoding="utf-8"?>
 <p:sld xmlns:a="http://schemas.openxmlformats.org/drawingml/2006/main" xmlns:p="http://schemas.openxmlformats.org/presentationml/2006/main" xmlns:r="http://schemas.openxmlformats.org/officeDocument/2006/relationships">
   <p:cSld>
     <p:spTree>

--- a/report/Vehicle_Selector_Pro_Pitch_Deck.pptx
+++ b/report/Vehicle_Selector_Pro_Pitch_Deck.pptx
@@ -20,6 +20,7 @@
     <p:sldId id="268" r:id="rId19"/>
     <p:sldId id="269" r:id="rId20"/>
     <p:sldId id="270" r:id="rId21"/>
+    <p:sldId id="271" r:id="rId22"/>
   </p:sldIdLst>
   <p:sldSz cx="12191695" cy="6858000" type="screen4x3"/>
   <p:notesSz cx="6858000" cy="9144000"/>
@@ -5543,7 +5544,7 @@
                 </a:solidFill>
                 <a:latin typeface="Calibri"/>
               </a:rPr>
-              <a:t>Built entirely with free AI tools</a:t>
+              <a:t>Built at the ceiling of a 2018 ultrabook</a:t>
             </a:r>
           </a:p>
         </p:txBody>
@@ -5605,6 +5606,367 @@
       </p:sp>
       <p:sp>
         <p:nvSpPr>
+          <p:cNvPr id="6" name="TextBox 5"/>
+          <p:cNvSpPr txBox="1"/>
+          <p:nvPr/>
+        </p:nvSpPr>
+        <p:spPr>
+          <a:xfrm>
+            <a:off x="914400" y="2103120"/>
+            <a:ext cx="10241280" cy="4023360"/>
+          </a:xfrm>
+          <a:prstGeom prst="rect">
+            <a:avLst/>
+          </a:prstGeom>
+          <a:noFill/>
+        </p:spPr>
+        <p:txBody>
+          <a:bodyPr wrap="square">
+            <a:spAutoFit/>
+          </a:bodyPr>
+          <a:lstStyle/>
+          <a:p>
+            <a:pPr>
+              <a:lnSpc>
+                <a:spcPct val="190000"/>
+              </a:lnSpc>
+              <a:spcAft>
+                <a:spcPts val="760"/>
+              </a:spcAft>
+            </a:pPr>
+            <a:r>
+              <a:rPr sz="1500" b="1">
+                <a:solidFill>
+                  <a:srgbClr val="E04B33"/>
+                </a:solidFill>
+              </a:rPr>
+              <a:t>▪  </a:t>
+            </a:r>
+            <a:r>
+              <a:rPr sz="1500">
+                <a:solidFill>
+                  <a:srgbClr val="282A2E"/>
+                </a:solidFill>
+                <a:latin typeface="Calibri"/>
+              </a:rPr>
+              <a:t>The entire project — Rails app, Shopify integration, storefront, diagrams, this deck, and both demo videos — was produced on one machine.</a:t>
+            </a:r>
+          </a:p>
+          <a:p>
+            <a:pPr>
+              <a:lnSpc>
+                <a:spcPct val="190000"/>
+              </a:lnSpc>
+              <a:spcAft>
+                <a:spcPts val="760"/>
+              </a:spcAft>
+            </a:pPr>
+            <a:r>
+              <a:rPr sz="1500" b="1">
+                <a:solidFill>
+                  <a:srgbClr val="E04B33"/>
+                </a:solidFill>
+              </a:rPr>
+              <a:t>▪  </a:t>
+            </a:r>
+            <a:r>
+              <a:rPr sz="1500">
+                <a:solidFill>
+                  <a:srgbClr val="282A2E"/>
+                </a:solidFill>
+                <a:latin typeface="Calibri"/>
+              </a:rPr>
+              <a:t>ASUS ZenBook UX433FA · Intel Core i7-8565U @ 1.80 GHz · 16 GB RAM.</a:t>
+            </a:r>
+          </a:p>
+          <a:p>
+            <a:pPr>
+              <a:lnSpc>
+                <a:spcPct val="190000"/>
+              </a:lnSpc>
+              <a:spcAft>
+                <a:spcPts val="760"/>
+              </a:spcAft>
+            </a:pPr>
+            <a:r>
+              <a:rPr sz="1500" b="1">
+                <a:solidFill>
+                  <a:srgbClr val="E04B33"/>
+                </a:solidFill>
+              </a:rPr>
+              <a:t>▪  </a:t>
+            </a:r>
+            <a:r>
+              <a:rPr sz="1500">
+                <a:solidFill>
+                  <a:srgbClr val="282A2E"/>
+                </a:solidFill>
+                <a:latin typeface="Calibri"/>
+              </a:rPr>
+              <a:t>Intel UHD 620 integrated graphics only — no GPU, no cluster; every frame of both demo videos was rendered on the CPU.</a:t>
+            </a:r>
+          </a:p>
+          <a:p>
+            <a:pPr>
+              <a:lnSpc>
+                <a:spcPct val="190000"/>
+              </a:lnSpc>
+              <a:spcAft>
+                <a:spcPts val="760"/>
+              </a:spcAft>
+            </a:pPr>
+            <a:r>
+              <a:rPr sz="1500" b="1">
+                <a:solidFill>
+                  <a:srgbClr val="E04B33"/>
+                </a:solidFill>
+              </a:rPr>
+              <a:t>▪  </a:t>
+            </a:r>
+            <a:r>
+              <a:rPr sz="1500">
+                <a:solidFill>
+                  <a:srgbClr val="282A2E"/>
+                </a:solidFill>
+                <a:latin typeface="Calibri"/>
+              </a:rPr>
+              <a:t>The output was capped by tooling, not ambition. Given a real workstation, a GPU, and paid frontier models, the same foundation leaps a level.</a:t>
+            </a:r>
+          </a:p>
+        </p:txBody>
+      </p:sp>
+    </p:spTree>
+  </p:cSld>
+  <p:clrMapOvr>
+    <a:masterClrMapping/>
+  </p:clrMapOvr>
+</p:sld>
+</file>
+
+<file path=ppt/slides/slide15.xml><?xml version="1.0" encoding="utf-8"?>
+<p:sld xmlns:a="http://schemas.openxmlformats.org/drawingml/2006/main" xmlns:p="http://schemas.openxmlformats.org/presentationml/2006/main" xmlns:r="http://schemas.openxmlformats.org/officeDocument/2006/relationships">
+  <p:cSld>
+    <p:spTree>
+      <p:nvGrpSpPr>
+        <p:cNvPr id="1" name=""/>
+        <p:cNvGrpSpPr/>
+        <p:nvPr/>
+      </p:nvGrpSpPr>
+      <p:grpSpPr/>
+      <p:sp>
+        <p:nvSpPr>
+          <p:cNvPr id="2" name="Rectangle 1"/>
+          <p:cNvSpPr/>
+          <p:nvPr/>
+        </p:nvSpPr>
+        <p:spPr>
+          <a:xfrm>
+            <a:off x="0" y="0"/>
+            <a:ext cx="12191695" cy="128016"/>
+          </a:xfrm>
+          <a:prstGeom prst="rect">
+            <a:avLst/>
+          </a:prstGeom>
+          <a:solidFill>
+            <a:srgbClr val="E04B33"/>
+          </a:solidFill>
+          <a:ln>
+            <a:solidFill>
+              <a:srgbClr val="E04B33"/>
+            </a:solidFill>
+          </a:ln>
+          <a:effectLst/>
+        </p:spPr>
+        <p:style>
+          <a:lnRef idx="1">
+            <a:schemeClr val="accent1"/>
+          </a:lnRef>
+          <a:fillRef idx="3">
+            <a:schemeClr val="accent1"/>
+          </a:fillRef>
+          <a:effectRef idx="2">
+            <a:schemeClr val="accent1"/>
+          </a:effectRef>
+          <a:fontRef idx="minor">
+            <a:schemeClr val="lt1"/>
+          </a:fontRef>
+        </p:style>
+        <p:txBody>
+          <a:bodyPr rtlCol="0" anchor="t" wrap="square"/>
+          <a:lstStyle/>
+          <a:p>
+            <a:pPr algn="l"/>
+            <a:r>
+              <a:rPr sz="1400" b="0">
+                <a:solidFill>
+                  <a:srgbClr val="282A2E"/>
+                </a:solidFill>
+                <a:latin typeface="Calibri"/>
+              </a:rPr>
+              <a:t/>
+            </a:r>
+          </a:p>
+        </p:txBody>
+      </p:sp>
+      <p:sp>
+        <p:nvSpPr>
+          <p:cNvPr id="3" name="Rectangle 2"/>
+          <p:cNvSpPr/>
+          <p:nvPr/>
+        </p:nvSpPr>
+        <p:spPr>
+          <a:xfrm>
+            <a:off x="822960" y="548640"/>
+            <a:ext cx="5486400" cy="365760"/>
+          </a:xfrm>
+          <a:prstGeom prst="rect">
+            <a:avLst/>
+          </a:prstGeom>
+          <a:noFill/>
+          <a:ln>
+            <a:noFill/>
+          </a:ln>
+          <a:effectLst/>
+        </p:spPr>
+        <p:style>
+          <a:lnRef idx="1">
+            <a:schemeClr val="accent1"/>
+          </a:lnRef>
+          <a:fillRef idx="3">
+            <a:schemeClr val="accent1"/>
+          </a:fillRef>
+          <a:effectRef idx="2">
+            <a:schemeClr val="accent1"/>
+          </a:effectRef>
+          <a:fontRef idx="minor">
+            <a:schemeClr val="lt1"/>
+          </a:fontRef>
+        </p:style>
+        <p:txBody>
+          <a:bodyPr rtlCol="0" anchor="t" wrap="square"/>
+          <a:lstStyle/>
+          <a:p>
+            <a:pPr algn="l"/>
+            <a:r>
+              <a:rPr sz="1200" b="1">
+                <a:solidFill>
+                  <a:srgbClr val="E04B33"/>
+                </a:solidFill>
+                <a:latin typeface="Calibri"/>
+              </a:rPr>
+              <a:t>BUILD · PROVENANCE</a:t>
+            </a:r>
+          </a:p>
+        </p:txBody>
+      </p:sp>
+      <p:sp>
+        <p:nvSpPr>
+          <p:cNvPr id="4" name="Rectangle 3"/>
+          <p:cNvSpPr/>
+          <p:nvPr/>
+        </p:nvSpPr>
+        <p:spPr>
+          <a:xfrm>
+            <a:off x="822960" y="914400"/>
+            <a:ext cx="10515600" cy="914400"/>
+          </a:xfrm>
+          <a:prstGeom prst="rect">
+            <a:avLst/>
+          </a:prstGeom>
+          <a:noFill/>
+          <a:ln>
+            <a:noFill/>
+          </a:ln>
+          <a:effectLst/>
+        </p:spPr>
+        <p:style>
+          <a:lnRef idx="1">
+            <a:schemeClr val="accent1"/>
+          </a:lnRef>
+          <a:fillRef idx="3">
+            <a:schemeClr val="accent1"/>
+          </a:fillRef>
+          <a:effectRef idx="2">
+            <a:schemeClr val="accent1"/>
+          </a:effectRef>
+          <a:fontRef idx="minor">
+            <a:schemeClr val="lt1"/>
+          </a:fontRef>
+        </p:style>
+        <p:txBody>
+          <a:bodyPr rtlCol="0" anchor="t" wrap="square"/>
+          <a:lstStyle/>
+          <a:p>
+            <a:pPr algn="l"/>
+            <a:r>
+              <a:rPr sz="2800" b="1">
+                <a:solidFill>
+                  <a:srgbClr val="282A2E"/>
+                </a:solidFill>
+                <a:latin typeface="Calibri"/>
+              </a:rPr>
+              <a:t>Free tools, minimal hardware — maximum headroom</a:t>
+            </a:r>
+          </a:p>
+        </p:txBody>
+      </p:sp>
+      <p:sp>
+        <p:nvSpPr>
+          <p:cNvPr id="5" name="Rectangle 4"/>
+          <p:cNvSpPr/>
+          <p:nvPr/>
+        </p:nvSpPr>
+        <p:spPr>
+          <a:xfrm>
+            <a:off x="822960" y="1828800"/>
+            <a:ext cx="10515600" cy="27432"/>
+          </a:xfrm>
+          <a:prstGeom prst="rect">
+            <a:avLst/>
+          </a:prstGeom>
+          <a:solidFill>
+            <a:srgbClr val="E04B33"/>
+          </a:solidFill>
+          <a:ln>
+            <a:solidFill>
+              <a:srgbClr val="E04B33"/>
+            </a:solidFill>
+          </a:ln>
+          <a:effectLst/>
+        </p:spPr>
+        <p:style>
+          <a:lnRef idx="1">
+            <a:schemeClr val="accent1"/>
+          </a:lnRef>
+          <a:fillRef idx="3">
+            <a:schemeClr val="accent1"/>
+          </a:fillRef>
+          <a:effectRef idx="2">
+            <a:schemeClr val="accent1"/>
+          </a:effectRef>
+          <a:fontRef idx="minor">
+            <a:schemeClr val="lt1"/>
+          </a:fontRef>
+        </p:style>
+        <p:txBody>
+          <a:bodyPr rtlCol="0" anchor="t" wrap="square"/>
+          <a:lstStyle/>
+          <a:p>
+            <a:pPr algn="l"/>
+            <a:r>
+              <a:rPr sz="1400" b="0">
+                <a:solidFill>
+                  <a:srgbClr val="282A2E"/>
+                </a:solidFill>
+                <a:latin typeface="Calibri"/>
+              </a:rPr>
+              <a:t/>
+            </a:r>
+          </a:p>
+        </p:txBody>
+      </p:sp>
+      <p:sp>
+        <p:nvSpPr>
           <p:cNvPr id="6" name="Rectangle 5"/>
           <p:cNvSpPr/>
           <p:nvPr/>
@@ -5653,7 +6015,7 @@
                 </a:solidFill>
                 <a:latin typeface="Calibri"/>
               </a:rPr>
-              <a:t>Designed, coded, and documented using no paid AI models, APIs, or commercial tooling. That ceiling is deliberate — it proves what free tooling already achieves, and sets up the next stage for a rapid leap forward.</a:t>
+              <a:t>No paid AI models, APIs, or commercial tooling were used anywhere — and the whole result was built and rendered on a 15-watt 2018 ultrabook with no GPU. Both are deliberate. They prove what free tooling on minimal local compute already achieves, and set up a fast leap forward: with proper hardware and paid frontier models, the ceiling lifts dramatically.</a:t>
             </a:r>
           </a:p>
         </p:txBody>
@@ -5666,7 +6028,7 @@
 </p:sld>
 </file>
 
-<file path=ppt/slides/slide15.xml><?xml version="1.0" encoding="utf-8"?>
+<file path=ppt/slides/slide16.xml><?xml version="1.0" encoding="utf-8"?>
 <p:sld xmlns:a="http://schemas.openxmlformats.org/drawingml/2006/main" xmlns:p="http://schemas.openxmlformats.org/presentationml/2006/main" xmlns:r="http://schemas.openxmlformats.org/officeDocument/2006/relationships">
   <p:cSld>
     <p:spTree>

--- a/report/Vehicle_Selector_Pro_Pitch_Deck.pptx
+++ b/report/Vehicle_Selector_Pro_Pitch_Deck.pptx
@@ -21,6 +21,7 @@
     <p:sldId id="269" r:id="rId20"/>
     <p:sldId id="270" r:id="rId21"/>
     <p:sldId id="271" r:id="rId22"/>
+    <p:sldId id="272" r:id="rId23"/>
   </p:sldIdLst>
   <p:sldSz cx="12191695" cy="6858000" type="screen4x3"/>
   <p:notesSz cx="6858000" cy="9144000"/>
@@ -6029,6 +6030,340 @@
 </file>
 
 <file path=ppt/slides/slide16.xml><?xml version="1.0" encoding="utf-8"?>
+<p:sld xmlns:a="http://schemas.openxmlformats.org/drawingml/2006/main" xmlns:p="http://schemas.openxmlformats.org/presentationml/2006/main" xmlns:r="http://schemas.openxmlformats.org/officeDocument/2006/relationships">
+  <p:cSld>
+    <p:spTree>
+      <p:nvGrpSpPr>
+        <p:cNvPr id="1" name=""/>
+        <p:cNvGrpSpPr/>
+        <p:nvPr/>
+      </p:nvGrpSpPr>
+      <p:grpSpPr/>
+      <p:sp>
+        <p:nvSpPr>
+          <p:cNvPr id="2" name="Rectangle 1"/>
+          <p:cNvSpPr/>
+          <p:nvPr/>
+        </p:nvSpPr>
+        <p:spPr>
+          <a:xfrm>
+            <a:off x="0" y="0"/>
+            <a:ext cx="12191695" cy="128016"/>
+          </a:xfrm>
+          <a:prstGeom prst="rect">
+            <a:avLst/>
+          </a:prstGeom>
+          <a:solidFill>
+            <a:srgbClr val="E04B33"/>
+          </a:solidFill>
+          <a:ln>
+            <a:solidFill>
+              <a:srgbClr val="E04B33"/>
+            </a:solidFill>
+          </a:ln>
+          <a:effectLst/>
+        </p:spPr>
+        <p:style>
+          <a:lnRef idx="1">
+            <a:schemeClr val="accent1"/>
+          </a:lnRef>
+          <a:fillRef idx="3">
+            <a:schemeClr val="accent1"/>
+          </a:fillRef>
+          <a:effectRef idx="2">
+            <a:schemeClr val="accent1"/>
+          </a:effectRef>
+          <a:fontRef idx="minor">
+            <a:schemeClr val="lt1"/>
+          </a:fontRef>
+        </p:style>
+        <p:txBody>
+          <a:bodyPr rtlCol="0" anchor="t" wrap="square"/>
+          <a:lstStyle/>
+          <a:p>
+            <a:pPr algn="l"/>
+            <a:r>
+              <a:rPr sz="1400" b="0">
+                <a:solidFill>
+                  <a:srgbClr val="282A2E"/>
+                </a:solidFill>
+                <a:latin typeface="Calibri"/>
+              </a:rPr>
+              <a:t/>
+            </a:r>
+          </a:p>
+        </p:txBody>
+      </p:sp>
+      <p:sp>
+        <p:nvSpPr>
+          <p:cNvPr id="3" name="Rectangle 2"/>
+          <p:cNvSpPr/>
+          <p:nvPr/>
+        </p:nvSpPr>
+        <p:spPr>
+          <a:xfrm>
+            <a:off x="822960" y="548640"/>
+            <a:ext cx="5486400" cy="365760"/>
+          </a:xfrm>
+          <a:prstGeom prst="rect">
+            <a:avLst/>
+          </a:prstGeom>
+          <a:noFill/>
+          <a:ln>
+            <a:noFill/>
+          </a:ln>
+          <a:effectLst/>
+        </p:spPr>
+        <p:style>
+          <a:lnRef idx="1">
+            <a:schemeClr val="accent1"/>
+          </a:lnRef>
+          <a:fillRef idx="3">
+            <a:schemeClr val="accent1"/>
+          </a:fillRef>
+          <a:effectRef idx="2">
+            <a:schemeClr val="accent1"/>
+          </a:effectRef>
+          <a:fontRef idx="minor">
+            <a:schemeClr val="lt1"/>
+          </a:fontRef>
+        </p:style>
+        <p:txBody>
+          <a:bodyPr rtlCol="0" anchor="t" wrap="square"/>
+          <a:lstStyle/>
+          <a:p>
+            <a:pPr algn="l"/>
+            <a:r>
+              <a:rPr sz="1200" b="1">
+                <a:solidFill>
+                  <a:srgbClr val="E04B33"/>
+                </a:solidFill>
+                <a:latin typeface="Calibri"/>
+              </a:rPr>
+              <a:t>SEE IT LIVE</a:t>
+            </a:r>
+          </a:p>
+        </p:txBody>
+      </p:sp>
+      <p:sp>
+        <p:nvSpPr>
+          <p:cNvPr id="4" name="Rectangle 3"/>
+          <p:cNvSpPr/>
+          <p:nvPr/>
+        </p:nvSpPr>
+        <p:spPr>
+          <a:xfrm>
+            <a:off x="822960" y="914400"/>
+            <a:ext cx="10515600" cy="914400"/>
+          </a:xfrm>
+          <a:prstGeom prst="rect">
+            <a:avLst/>
+          </a:prstGeom>
+          <a:noFill/>
+          <a:ln>
+            <a:noFill/>
+          </a:ln>
+          <a:effectLst/>
+        </p:spPr>
+        <p:style>
+          <a:lnRef idx="1">
+            <a:schemeClr val="accent1"/>
+          </a:lnRef>
+          <a:fillRef idx="3">
+            <a:schemeClr val="accent1"/>
+          </a:fillRef>
+          <a:effectRef idx="2">
+            <a:schemeClr val="accent1"/>
+          </a:effectRef>
+          <a:fontRef idx="minor">
+            <a:schemeClr val="lt1"/>
+          </a:fontRef>
+        </p:style>
+        <p:txBody>
+          <a:bodyPr rtlCol="0" anchor="t" wrap="square"/>
+          <a:lstStyle/>
+          <a:p>
+            <a:pPr algn="l"/>
+            <a:r>
+              <a:rPr sz="2800" b="1">
+                <a:solidFill>
+                  <a:srgbClr val="282A2E"/>
+                </a:solidFill>
+                <a:latin typeface="Calibri"/>
+              </a:rPr>
+              <a:t>Watch the three narrated walkthroughs</a:t>
+            </a:r>
+          </a:p>
+        </p:txBody>
+      </p:sp>
+      <p:sp>
+        <p:nvSpPr>
+          <p:cNvPr id="5" name="Rectangle 4"/>
+          <p:cNvSpPr/>
+          <p:nvPr/>
+        </p:nvSpPr>
+        <p:spPr>
+          <a:xfrm>
+            <a:off x="822960" y="1828800"/>
+            <a:ext cx="10515600" cy="27432"/>
+          </a:xfrm>
+          <a:prstGeom prst="rect">
+            <a:avLst/>
+          </a:prstGeom>
+          <a:solidFill>
+            <a:srgbClr val="E04B33"/>
+          </a:solidFill>
+          <a:ln>
+            <a:solidFill>
+              <a:srgbClr val="E04B33"/>
+            </a:solidFill>
+          </a:ln>
+          <a:effectLst/>
+        </p:spPr>
+        <p:style>
+          <a:lnRef idx="1">
+            <a:schemeClr val="accent1"/>
+          </a:lnRef>
+          <a:fillRef idx="3">
+            <a:schemeClr val="accent1"/>
+          </a:fillRef>
+          <a:effectRef idx="2">
+            <a:schemeClr val="accent1"/>
+          </a:effectRef>
+          <a:fontRef idx="minor">
+            <a:schemeClr val="lt1"/>
+          </a:fontRef>
+        </p:style>
+        <p:txBody>
+          <a:bodyPr rtlCol="0" anchor="t" wrap="square"/>
+          <a:lstStyle/>
+          <a:p>
+            <a:pPr algn="l"/>
+            <a:r>
+              <a:rPr sz="1400" b="0">
+                <a:solidFill>
+                  <a:srgbClr val="282A2E"/>
+                </a:solidFill>
+                <a:latin typeface="Calibri"/>
+              </a:rPr>
+              <a:t/>
+            </a:r>
+          </a:p>
+        </p:txBody>
+      </p:sp>
+      <p:sp>
+        <p:nvSpPr>
+          <p:cNvPr id="6" name="TextBox 5"/>
+          <p:cNvSpPr txBox="1"/>
+          <p:nvPr/>
+        </p:nvSpPr>
+        <p:spPr>
+          <a:xfrm>
+            <a:off x="914400" y="2103120"/>
+            <a:ext cx="10241280" cy="4023360"/>
+          </a:xfrm>
+          <a:prstGeom prst="rect">
+            <a:avLst/>
+          </a:prstGeom>
+          <a:noFill/>
+        </p:spPr>
+        <p:txBody>
+          <a:bodyPr wrap="square">
+            <a:spAutoFit/>
+          </a:bodyPr>
+          <a:lstStyle/>
+          <a:p>
+            <a:pPr>
+              <a:lnSpc>
+                <a:spcPct val="190000"/>
+              </a:lnSpc>
+              <a:spcAft>
+                <a:spcPts val="760"/>
+              </a:spcAft>
+            </a:pPr>
+            <a:r>
+              <a:rPr sz="1500" b="1">
+                <a:solidFill>
+                  <a:srgbClr val="E04B33"/>
+                </a:solidFill>
+              </a:rPr>
+              <a:t>▪  </a:t>
+            </a:r>
+            <a:r>
+              <a:rPr sz="1500">
+                <a:solidFill>
+                  <a:srgbClr val="282A2E"/>
+                </a:solidFill>
+                <a:latin typeface="Calibri"/>
+              </a:rPr>
+              <a:t>Live application — &lt;a href='https://ai-dev-2024.github.io/vehicle-selector-pro/demo/vehicle-selector-pro-live.mp4'&gt;&lt;font color='#E04B33'&gt;&lt;b&gt;watch the real deployment&lt;/b&gt;&lt;/font&gt;&lt;/a&gt; · 1:27</a:t>
+            </a:r>
+          </a:p>
+          <a:p>
+            <a:pPr>
+              <a:lnSpc>
+                <a:spcPct val="190000"/>
+              </a:lnSpc>
+              <a:spcAft>
+                <a:spcPts val="760"/>
+              </a:spcAft>
+            </a:pPr>
+            <a:r>
+              <a:rPr sz="1500" b="1">
+                <a:solidFill>
+                  <a:srgbClr val="E04B33"/>
+                </a:solidFill>
+              </a:rPr>
+              <a:t>▪  </a:t>
+            </a:r>
+            <a:r>
+              <a:rPr sz="1500">
+                <a:solidFill>
+                  <a:srgbClr val="282A2E"/>
+                </a:solidFill>
+                <a:latin typeface="Calibri"/>
+              </a:rPr>
+              <a:t>Merchant command center — &lt;a href='https://ai-dev-2024.github.io/vehicle-selector-pro/demo/vehicle-selector-pro-merchant.mp4'&gt;&lt;font color='#E04B33'&gt;&lt;b&gt;watch&lt;/b&gt;&lt;/font&gt;&lt;/a&gt; · 2:09</a:t>
+            </a:r>
+          </a:p>
+          <a:p>
+            <a:pPr>
+              <a:lnSpc>
+                <a:spcPct val="190000"/>
+              </a:lnSpc>
+              <a:spcAft>
+                <a:spcPts val="760"/>
+              </a:spcAft>
+            </a:pPr>
+            <a:r>
+              <a:rPr sz="1500" b="1">
+                <a:solidFill>
+                  <a:srgbClr val="E04B33"/>
+                </a:solidFill>
+              </a:rPr>
+              <a:t>▪  </a:t>
+            </a:r>
+            <a:r>
+              <a:rPr sz="1500">
+                <a:solidFill>
+                  <a:srgbClr val="282A2E"/>
+                </a:solidFill>
+                <a:latin typeface="Calibri"/>
+              </a:rPr>
+              <a:t>Shopper experience — &lt;a href='https://ai-dev-2024.github.io/vehicle-selector-pro/demo/vehicle-selector-pro-shopper.mp4'&gt;&lt;font color='#E04B33'&gt;&lt;b&gt;watch&lt;/b&gt;&lt;/font&gt;&lt;/a&gt; · 2:21</a:t>
+            </a:r>
+          </a:p>
+        </p:txBody>
+      </p:sp>
+    </p:spTree>
+  </p:cSld>
+  <p:clrMapOvr>
+    <a:masterClrMapping/>
+  </p:clrMapOvr>
+</p:sld>
+</file>
+
+<file path=ppt/slides/slide17.xml><?xml version="1.0" encoding="utf-8"?>
 <p:sld xmlns:a="http://schemas.openxmlformats.org/drawingml/2006/main" xmlns:p="http://schemas.openxmlformats.org/presentationml/2006/main" xmlns:r="http://schemas.openxmlformats.org/officeDocument/2006/relationships">
   <p:cSld>
     <p:spTree>

--- a/report/Vehicle_Selector_Pro_Pitch_Deck.pptx
+++ b/report/Vehicle_Selector_Pro_Pitch_Deck.pptx
@@ -6296,7 +6296,7 @@
                 </a:solidFill>
                 <a:latin typeface="Calibri"/>
               </a:rPr>
-              <a:t>Live application — &lt;a href='https://ai-dev-2024.github.io/vehicle-selector-pro/demo/vehicle-selector-pro-live.mp4'&gt;&lt;font color='#E04B33'&gt;&lt;b&gt;watch the real deployment&lt;/b&gt;&lt;/font&gt;&lt;/a&gt; · 1:27</a:t>
+              <a:t>Live application — &lt;a href='https://ai-dev-2024.github.io/vehicle-selector-pro/demo/vehicle-selector-pro-live.mp4'&gt;&lt;font color='#E04B33'&gt;&lt;b&gt;watch the real deployment&lt;/b&gt;&lt;/font&gt;&lt;/a&gt; · 2:25</a:t>
             </a:r>
           </a:p>
           <a:p>
@@ -6323,7 +6323,7 @@
                 </a:solidFill>
                 <a:latin typeface="Calibri"/>
               </a:rPr>
-              <a:t>Merchant command center — &lt;a href='https://ai-dev-2024.github.io/vehicle-selector-pro/demo/vehicle-selector-pro-merchant.mp4'&gt;&lt;font color='#E04B33'&gt;&lt;b&gt;watch&lt;/b&gt;&lt;/font&gt;&lt;/a&gt; · 2:09</a:t>
+              <a:t>Merchant command center — &lt;a href='https://ai-dev-2024.github.io/vehicle-selector-pro/demo/vehicle-selector-pro-merchant.mp4'&gt;&lt;font color='#E04B33'&gt;&lt;b&gt;watch&lt;/b&gt;&lt;/font&gt;&lt;/a&gt; · 2:34</a:t>
             </a:r>
           </a:p>
           <a:p>
@@ -6350,7 +6350,7 @@
                 </a:solidFill>
                 <a:latin typeface="Calibri"/>
               </a:rPr>
-              <a:t>Shopper experience — &lt;a href='https://ai-dev-2024.github.io/vehicle-selector-pro/demo/vehicle-selector-pro-shopper.mp4'&gt;&lt;font color='#E04B33'&gt;&lt;b&gt;watch&lt;/b&gt;&lt;/font&gt;&lt;/a&gt; · 2:21</a:t>
+              <a:t>Shopper experience — &lt;a href='https://ai-dev-2024.github.io/vehicle-selector-pro/demo/vehicle-selector-pro-shopper.mp4'&gt;&lt;font color='#E04B33'&gt;&lt;b&gt;watch&lt;/b&gt;&lt;/font&gt;&lt;/a&gt; · 2:44</a:t>
             </a:r>
           </a:p>
         </p:txBody>

--- a/report/Vehicle_Selector_Pro_Pitch_Deck.pptx
+++ b/report/Vehicle_Selector_Pro_Pitch_Deck.pptx
@@ -4012,7 +4012,7 @@
       </p:pic>
       <p:pic>
         <p:nvPicPr>
-          <p:cNvPr id="9" name="Picture 8" descr="08_storefront_pdp.png"/>
+          <p:cNvPr id="9" name="Picture 8" descr="01_dashboard.png"/>
           <p:cNvPicPr>
             <a:picLocks noChangeAspect="1"/>
           </p:cNvPicPr>
@@ -4027,54 +4027,6 @@
         <p:spPr>
           <a:xfrm>
             <a:off x="3451860" y="3657600"/>
-            <a:ext cx="2217420" cy="1247298"/>
-          </a:xfrm>
-          <a:prstGeom prst="rect">
-            <a:avLst/>
-          </a:prstGeom>
-        </p:spPr>
-      </p:pic>
-      <p:pic>
-        <p:nvPicPr>
-          <p:cNvPr id="10" name="Picture 9" descr="03_fitment_rules.png"/>
-          <p:cNvPicPr>
-            <a:picLocks noChangeAspect="1"/>
-          </p:cNvPicPr>
-          <p:nvPr/>
-        </p:nvPicPr>
-        <p:blipFill>
-          <a:blip r:embed="rId4"/>
-          <a:stretch>
-            <a:fillRect/>
-          </a:stretch>
-        </p:blipFill>
-        <p:spPr>
-          <a:xfrm>
-            <a:off x="914400" y="5120640"/>
-            <a:ext cx="2217420" cy="1247298"/>
-          </a:xfrm>
-          <a:prstGeom prst="rect">
-            <a:avLst/>
-          </a:prstGeom>
-        </p:spPr>
-      </p:pic>
-      <p:pic>
-        <p:nvPicPr>
-          <p:cNvPr id="11" name="Picture 10" descr="01_dashboard.png"/>
-          <p:cNvPicPr>
-            <a:picLocks noChangeAspect="1"/>
-          </p:cNvPicPr>
-          <p:nvPr/>
-        </p:nvPicPr>
-        <p:blipFill>
-          <a:blip r:embed="rId5"/>
-          <a:stretch>
-            <a:fillRect/>
-          </a:stretch>
-        </p:blipFill>
-        <p:spPr>
-          <a:xfrm>
-            <a:off x="3451860" y="5120640"/>
             <a:ext cx="2217420" cy="1247298"/>
           </a:xfrm>
           <a:prstGeom prst="rect">

--- a/report/Vehicle_Selector_Pro_Pitch_Deck.pptx
+++ b/report/Vehicle_Selector_Pro_Pitch_Deck.pptx
@@ -5974,7 +5974,7 @@
                 </a:solidFill>
                 <a:latin typeface="Calibri"/>
               </a:rPr>
-              <a:t>Watch the three narrated walkthroughs</a:t>
+              <a:t>Watch the two narrated walkthroughs</a:t>
             </a:r>
           </a:p>
         </p:txBody>

--- a/report/Vehicle_Selector_Pro_Pitch_Deck.pptx
+++ b/report/Vehicle_Selector_Pro_Pitch_Deck.pptx
@@ -3539,13 +3539,23 @@
           <a:lstStyle/>
           <a:p>
             <a:r>
-              <a:rPr sz="1300">
-                <a:solidFill>
-                  <a:srgbClr val="E04B33"/>
+              <a:rPr sz="1300" b="1">
+                <a:solidFill>
+                  <a:srgbClr val="282A2E"/>
                 </a:solidFill>
                 <a:latin typeface="Calibri"/>
               </a:rPr>
-              <a:t>Live demo:  https://vehicle-selector-pro.fly.dev/demo</a:t>
+              <a:t>Live demo:  </a:t>
+            </a:r>
+            <a:r>
+              <a:rPr sz="1300" u="sng">
+                <a:solidFill>
+                  <a:srgbClr val="E04B33"/>
+                </a:solidFill>
+                <a:latin typeface="Calibri"/>
+                <a:hlinkClick r:id="rId2"/>
+              </a:rPr>
+              <a:t>https://vehicle-selector-pro.fly.dev/demo</a:t>
             </a:r>
           </a:p>
         </p:txBody>
@@ -3573,13 +3583,23 @@
           <a:lstStyle/>
           <a:p>
             <a:r>
-              <a:rPr sz="1300">
-                <a:solidFill>
-                  <a:srgbClr val="E04B33"/>
+              <a:rPr sz="1300" b="1">
+                <a:solidFill>
+                  <a:srgbClr val="282A2E"/>
                 </a:solidFill>
                 <a:latin typeface="Calibri"/>
               </a:rPr>
-              <a:t>Merchant admin:  https://vehicle-selector-pro.fly.dev/demo/admin</a:t>
+              <a:t>Merchant admin:  </a:t>
+            </a:r>
+            <a:r>
+              <a:rPr sz="1300" u="sng">
+                <a:solidFill>
+                  <a:srgbClr val="E04B33"/>
+                </a:solidFill>
+                <a:latin typeface="Calibri"/>
+                <a:hlinkClick r:id="rId3"/>
+              </a:rPr>
+              <a:t>https://vehicle-selector-pro.fly.dev/demo/admin</a:t>
             </a:r>
           </a:p>
         </p:txBody>
@@ -3607,13 +3627,23 @@
           <a:lstStyle/>
           <a:p>
             <a:r>
-              <a:rPr sz="1300">
-                <a:solidFill>
-                  <a:srgbClr val="E04B33"/>
+              <a:rPr sz="1300" b="1">
+                <a:solidFill>
+                  <a:srgbClr val="282A2E"/>
                 </a:solidFill>
                 <a:latin typeface="Calibri"/>
               </a:rPr>
-              <a:t>Repository:  https://github.com/ai-dev-2024/vehicle-selector-pro</a:t>
+              <a:t>Repository:  </a:t>
+            </a:r>
+            <a:r>
+              <a:rPr sz="1300" u="sng">
+                <a:solidFill>
+                  <a:srgbClr val="E04B33"/>
+                </a:solidFill>
+                <a:latin typeface="Calibri"/>
+                <a:hlinkClick r:id="rId4"/>
+              </a:rPr>
+              <a:t>https://github.com/ai-dev-2024/vehicle-selector-pro</a:t>
             </a:r>
           </a:p>
         </p:txBody>
@@ -5661,6 +5691,7 @@
                   <a:srgbClr val="282A2E"/>
                 </a:solidFill>
                 <a:latin typeface="Calibri"/>
+                <a:hlinkClick r:id="rId2"/>
               </a:rPr>
               <a:t>Try the live storefront demo</a:t>
             </a:r>
@@ -5765,6 +5796,7 @@
                   <a:srgbClr val="282A2E"/>
                 </a:solidFill>
                 <a:latin typeface="Calibri"/>
+                <a:hlinkClick r:id="rId3"/>
               </a:rPr>
               <a:t>Explore the merchant admin</a:t>
             </a:r>
@@ -5869,6 +5901,7 @@
                   <a:srgbClr val="282A2E"/>
                 </a:solidFill>
                 <a:latin typeface="Calibri"/>
+                <a:hlinkClick r:id="rId4"/>
               </a:rPr>
               <a:t>Open the repository</a:t>
             </a:r>
@@ -5973,6 +6006,7 @@
                   <a:srgbClr val="282A2E"/>
                 </a:solidFill>
                 <a:latin typeface="Calibri"/>
+                <a:hlinkClick r:id="rId5"/>
               </a:rPr>
               <a:t>Watch the two narrated walkthroughs</a:t>
             </a:r>

--- a/report/Vehicle_Selector_Pro_Pitch_Deck.pptx
+++ b/report/Vehicle_Selector_Pro_Pitch_Deck.pptx
@@ -4014,6 +4014,33 @@
               <a:t>Paid fitment feeds lock merchants into contracts</a:t>
             </a:r>
           </a:p>
+          <a:p>
+            <a:pPr>
+              <a:lnSpc>
+                <a:spcPct val="150000"/>
+              </a:lnSpc>
+              <a:spcAft>
+                <a:spcPts val="600"/>
+              </a:spcAft>
+            </a:pPr>
+            <a:r>
+              <a:rPr sz="1200" b="1">
+                <a:solidFill>
+                  <a:srgbClr val="E04B33"/>
+                </a:solidFill>
+              </a:rPr>
+              <a:t>▪  </a:t>
+            </a:r>
+            <a:r>
+              <a:rPr sz="1200">
+                <a:solidFill>
+                  <a:srgbClr val="282A2E"/>
+                </a:solidFill>
+                <a:latin typeface="Calibri"/>
+              </a:rPr>
+              <a:t>Built end-to-end with free AI tooling on a 2018 ASUS ZenBook — proof of the headroom ahead</a:t>
+            </a:r>
+          </a:p>
         </p:txBody>
       </p:sp>
       <p:pic>
@@ -4450,7 +4477,7 @@
                 </a:solidFill>
                 <a:latin typeface="Calibri"/>
               </a:rPr>
-              <a:t>204</a:t>
+              <a:t>402</a:t>
             </a:r>
           </a:p>
         </p:txBody>
@@ -4556,7 +4583,7 @@
                 </a:solidFill>
                 <a:latin typeface="Calibri"/>
               </a:rPr>
-              <a:t>40</a:t>
+              <a:t>74</a:t>
             </a:r>
           </a:p>
         </p:txBody>
@@ -4662,7 +4689,7 @@
                 </a:solidFill>
                 <a:latin typeface="Calibri"/>
               </a:rPr>
-              <a:t>8</a:t>
+              <a:t>25</a:t>
             </a:r>
           </a:p>
         </p:txBody>
